--- a/SO/individ/so.pptx
+++ b/SO/individ/so.pptx
@@ -24,8 +24,7 @@
     <p:sldId id="298" r:id="rId18"/>
     <p:sldId id="267" r:id="rId19"/>
     <p:sldId id="263" r:id="rId20"/>
-    <p:sldId id="264" r:id="rId21"/>
-    <p:sldId id="265" r:id="rId22"/>
+    <p:sldId id="265" r:id="rId21"/>
   </p:sldIdLst>
   <p:sldSz cx="12192000" cy="6858000"/>
   <p:notesSz cx="6858000" cy="9144000"/>
@@ -227,7 +226,7 @@
           <a:effectLst/>
           <a:extLst>
             <a:ext uri="{91240B29-F687-4f45-9708-019B960494DF}">
-              <a14:hiddenLine xmlns:a14="http://schemas.microsoft.com/office/drawing/2010/main" xmlns="" w="9525">
+              <a14:hiddenLine xmlns="" xmlns:a14="http://schemas.microsoft.com/office/drawing/2010/main" w="9525">
                 <a:solidFill>
                   <a:srgbClr val="000000"/>
                 </a:solidFill>
@@ -419,7 +418,7 @@
           <a:p>
             <a:fld id="{ECCD5D98-32A5-4373-B94A-46088ED855F3}" type="datetimeFigureOut">
               <a:rPr lang="en-GB" smtClean="0"/>
-              <a:t>30/11/2023</a:t>
+              <a:t>08/12/2023</a:t>
             </a:fld>
             <a:endParaRPr lang="en-GB"/>
           </a:p>
@@ -737,7 +736,7 @@
           <a:p>
             <a:fld id="{ECCD5D98-32A5-4373-B94A-46088ED855F3}" type="datetimeFigureOut">
               <a:rPr lang="en-GB" smtClean="0"/>
-              <a:t>30/11/2023</a:t>
+              <a:t>08/12/2023</a:t>
             </a:fld>
             <a:endParaRPr lang="en-GB"/>
           </a:p>
@@ -1225,7 +1224,7 @@
           <a:p>
             <a:fld id="{ECCD5D98-32A5-4373-B94A-46088ED855F3}" type="datetimeFigureOut">
               <a:rPr lang="en-GB" smtClean="0"/>
-              <a:t>30/11/2023</a:t>
+              <a:t>08/12/2023</a:t>
             </a:fld>
             <a:endParaRPr lang="en-GB"/>
           </a:p>
@@ -1594,7 +1593,7 @@
           <a:p>
             <a:fld id="{ECCD5D98-32A5-4373-B94A-46088ED855F3}" type="datetimeFigureOut">
               <a:rPr lang="en-GB" smtClean="0"/>
-              <a:t>30/11/2023</a:t>
+              <a:t>08/12/2023</a:t>
             </a:fld>
             <a:endParaRPr lang="en-GB"/>
           </a:p>
@@ -1749,7 +1748,7 @@
           <a:ln/>
           <a:extLst>
             <a:ext uri="{91240B29-F687-4f45-9708-019B960494DF}">
-              <a14:hiddenLine xmlns:a14="http://schemas.microsoft.com/office/drawing/2010/main" xmlns="" w="9525">
+              <a14:hiddenLine xmlns="" xmlns:a14="http://schemas.microsoft.com/office/drawing/2010/main" w="9525">
                 <a:solidFill>
                   <a:srgbClr val="000000"/>
                 </a:solidFill>
@@ -1867,7 +1866,7 @@
           <a:p>
             <a:fld id="{ECCD5D98-32A5-4373-B94A-46088ED855F3}" type="datetimeFigureOut">
               <a:rPr lang="en-GB" smtClean="0"/>
-              <a:t>30/11/2023</a:t>
+              <a:t>08/12/2023</a:t>
             </a:fld>
             <a:endParaRPr lang="en-GB"/>
           </a:p>
@@ -2024,7 +2023,7 @@
           <a:ln/>
           <a:extLst>
             <a:ext uri="{91240B29-F687-4f45-9708-019B960494DF}">
-              <a14:hiddenLine xmlns:a14="http://schemas.microsoft.com/office/drawing/2010/main" xmlns="" w="9525">
+              <a14:hiddenLine xmlns="" xmlns:a14="http://schemas.microsoft.com/office/drawing/2010/main" w="9525">
                 <a:solidFill>
                   <a:srgbClr val="000000"/>
                 </a:solidFill>
@@ -2152,7 +2151,7 @@
           <a:p>
             <a:fld id="{ECCD5D98-32A5-4373-B94A-46088ED855F3}" type="datetimeFigureOut">
               <a:rPr lang="en-GB" smtClean="0"/>
-              <a:t>30/11/2023</a:t>
+              <a:t>08/12/2023</a:t>
             </a:fld>
             <a:endParaRPr lang="en-GB"/>
           </a:p>
@@ -2438,7 +2437,7 @@
           <a:p>
             <a:fld id="{ECCD5D98-32A5-4373-B94A-46088ED855F3}" type="datetimeFigureOut">
               <a:rPr lang="en-GB" smtClean="0"/>
-              <a:t>30/11/2023</a:t>
+              <a:t>08/12/2023</a:t>
             </a:fld>
             <a:endParaRPr lang="en-GB"/>
           </a:p>
@@ -2619,7 +2618,7 @@
           <a:ln/>
           <a:extLst>
             <a:ext uri="{91240B29-F687-4f45-9708-019B960494DF}">
-              <a14:hiddenLine xmlns:a14="http://schemas.microsoft.com/office/drawing/2010/main" xmlns="" w="9525">
+              <a14:hiddenLine xmlns="" xmlns:a14="http://schemas.microsoft.com/office/drawing/2010/main" w="9525">
                 <a:solidFill>
                   <a:srgbClr val="000000"/>
                 </a:solidFill>
@@ -2747,7 +2746,7 @@
           <a:p>
             <a:fld id="{ECCD5D98-32A5-4373-B94A-46088ED855F3}" type="datetimeFigureOut">
               <a:rPr lang="en-GB" smtClean="0"/>
-              <a:t>30/11/2023</a:t>
+              <a:t>08/12/2023</a:t>
             </a:fld>
             <a:endParaRPr lang="en-GB"/>
           </a:p>
@@ -3090,7 +3089,7 @@
           <a:p>
             <a:fld id="{ECCD5D98-32A5-4373-B94A-46088ED855F3}" type="datetimeFigureOut">
               <a:rPr lang="en-GB" smtClean="0"/>
-              <a:t>30/11/2023</a:t>
+              <a:t>08/12/2023</a:t>
             </a:fld>
             <a:endParaRPr lang="en-GB"/>
           </a:p>
@@ -3245,7 +3244,7 @@
           <a:ln/>
           <a:extLst>
             <a:ext uri="{91240B29-F687-4f45-9708-019B960494DF}">
-              <a14:hiddenLine xmlns:a14="http://schemas.microsoft.com/office/drawing/2010/main" xmlns="" w="9525">
+              <a14:hiddenLine xmlns="" xmlns:a14="http://schemas.microsoft.com/office/drawing/2010/main" w="9525">
                 <a:solidFill>
                   <a:srgbClr val="000000"/>
                 </a:solidFill>
@@ -3429,7 +3428,7 @@
           <a:p>
             <a:fld id="{ECCD5D98-32A5-4373-B94A-46088ED855F3}" type="datetimeFigureOut">
               <a:rPr lang="en-GB" smtClean="0"/>
-              <a:t>30/11/2023</a:t>
+              <a:t>08/12/2023</a:t>
             </a:fld>
             <a:endParaRPr lang="en-GB"/>
           </a:p>
@@ -3584,7 +3583,7 @@
           <a:ln/>
           <a:extLst>
             <a:ext uri="{91240B29-F687-4f45-9708-019B960494DF}">
-              <a14:hiddenLine xmlns:a14="http://schemas.microsoft.com/office/drawing/2010/main" xmlns="" w="9525">
+              <a14:hiddenLine xmlns="" xmlns:a14="http://schemas.microsoft.com/office/drawing/2010/main" w="9525">
                 <a:solidFill>
                   <a:srgbClr val="000000"/>
                 </a:solidFill>
@@ -3906,7 +3905,7 @@
           <a:p>
             <a:fld id="{ECCD5D98-32A5-4373-B94A-46088ED855F3}" type="datetimeFigureOut">
               <a:rPr lang="en-GB" smtClean="0"/>
-              <a:t>30/11/2023</a:t>
+              <a:t>08/12/2023</a:t>
             </a:fld>
             <a:endParaRPr lang="en-GB"/>
           </a:p>
@@ -4061,7 +4060,7 @@
           <a:ln/>
           <a:extLst>
             <a:ext uri="{91240B29-F687-4f45-9708-019B960494DF}">
-              <a14:hiddenLine xmlns:a14="http://schemas.microsoft.com/office/drawing/2010/main" xmlns="" w="9525">
+              <a14:hiddenLine xmlns="" xmlns:a14="http://schemas.microsoft.com/office/drawing/2010/main" w="9525">
                 <a:solidFill>
                   <a:srgbClr val="000000"/>
                 </a:solidFill>
@@ -4127,7 +4126,7 @@
           <a:p>
             <a:fld id="{ECCD5D98-32A5-4373-B94A-46088ED855F3}" type="datetimeFigureOut">
               <a:rPr lang="en-GB" smtClean="0"/>
-              <a:t>30/11/2023</a:t>
+              <a:t>08/12/2023</a:t>
             </a:fld>
             <a:endParaRPr lang="en-GB"/>
           </a:p>
@@ -4222,7 +4221,7 @@
           <a:p>
             <a:fld id="{ECCD5D98-32A5-4373-B94A-46088ED855F3}" type="datetimeFigureOut">
               <a:rPr lang="en-GB" smtClean="0"/>
-              <a:t>30/11/2023</a:t>
+              <a:t>08/12/2023</a:t>
             </a:fld>
             <a:endParaRPr lang="en-GB"/>
           </a:p>
@@ -4490,7 +4489,7 @@
           <a:ln/>
           <a:extLst>
             <a:ext uri="{91240B29-F687-4f45-9708-019B960494DF}">
-              <a14:hiddenLine xmlns:a14="http://schemas.microsoft.com/office/drawing/2010/main" xmlns="" w="9525">
+              <a14:hiddenLine xmlns="" xmlns:a14="http://schemas.microsoft.com/office/drawing/2010/main" w="9525">
                 <a:solidFill>
                   <a:srgbClr val="000000"/>
                 </a:solidFill>
@@ -4689,7 +4688,7 @@
           <a:p>
             <a:fld id="{ECCD5D98-32A5-4373-B94A-46088ED855F3}" type="datetimeFigureOut">
               <a:rPr lang="en-GB" smtClean="0"/>
-              <a:t>30/11/2023</a:t>
+              <a:t>08/12/2023</a:t>
             </a:fld>
             <a:endParaRPr lang="en-GB"/>
           </a:p>
@@ -5002,7 +5001,7 @@
           <a:p>
             <a:fld id="{ECCD5D98-32A5-4373-B94A-46088ED855F3}" type="datetimeFigureOut">
               <a:rPr lang="en-GB" smtClean="0"/>
-              <a:t>30/11/2023</a:t>
+              <a:t>08/12/2023</a:t>
             </a:fld>
             <a:endParaRPr lang="en-GB"/>
           </a:p>
@@ -5272,7 +5271,7 @@
           <a:p>
             <a:fld id="{ECCD5D98-32A5-4373-B94A-46088ED855F3}" type="datetimeFigureOut">
               <a:rPr lang="en-GB" smtClean="0"/>
-              <a:t>30/11/2023</a:t>
+              <a:t>08/12/2023</a:t>
             </a:fld>
             <a:endParaRPr lang="en-GB"/>
           </a:p>
@@ -8325,111 +8324,6 @@
           <a:p>
             <a:r>
               <a:rPr lang="ru-RU" b="1" dirty="0"/>
-              <a:t>Современные технологии и тренды:</a:t>
-            </a:r>
-            <a:endParaRPr lang="en-GB" dirty="0"/>
-          </a:p>
-        </p:txBody>
-      </p:sp>
-      <p:sp>
-        <p:nvSpPr>
-          <p:cNvPr id="3" name="Объект 2"/>
-          <p:cNvSpPr>
-            <a:spLocks noGrp="1"/>
-          </p:cNvSpPr>
-          <p:nvPr>
-            <p:ph idx="1"/>
-          </p:nvPr>
-        </p:nvSpPr>
-        <p:spPr>
-          <a:xfrm>
-            <a:off x="818712" y="2222287"/>
-            <a:ext cx="10452538" cy="4188525"/>
-          </a:xfrm>
-        </p:spPr>
-        <p:txBody>
-          <a:bodyPr/>
-          <a:lstStyle/>
-          <a:p>
-            <a:r>
-              <a:rPr lang="ru-RU" dirty="0"/>
-              <a:t>Технологии, влияющие на развитие материнских плат Влияние: Возможности </a:t>
-            </a:r>
-            <a:r>
-              <a:rPr lang="ru-RU" dirty="0" err="1"/>
-              <a:t>NVMe</a:t>
-            </a:r>
-            <a:r>
-              <a:rPr lang="ru-RU" dirty="0"/>
-              <a:t>, USB-C, поддержка новых стандартов.. Быстрый прогресс технологий, таких как </a:t>
-            </a:r>
-            <a:r>
-              <a:rPr lang="ru-RU" dirty="0" err="1"/>
-              <a:t>NVMe</a:t>
-            </a:r>
-            <a:r>
-              <a:rPr lang="ru-RU" dirty="0"/>
-              <a:t> и USB-C, оказывает существенное влияние на возможности материнских плат, а прогнозы развития предостерегают нас от будущих изменений.</a:t>
-            </a:r>
-          </a:p>
-          <a:p>
-            <a:endParaRPr lang="ru-RU" dirty="0"/>
-          </a:p>
-          <a:p>
-            <a:r>
-              <a:rPr lang="ru-RU" dirty="0"/>
-              <a:t>Прогнозы будущего развития. Развитие технологий и их влияние на материнские платы.</a:t>
-            </a:r>
-          </a:p>
-        </p:txBody>
-      </p:sp>
-    </p:spTree>
-    <p:extLst>
-      <p:ext uri="{BB962C8B-B14F-4D97-AF65-F5344CB8AC3E}">
-        <p14:creationId xmlns:p14="http://schemas.microsoft.com/office/powerpoint/2010/main" val="482615578"/>
-      </p:ext>
-    </p:extLst>
-  </p:cSld>
-  <p:clrMapOvr>
-    <a:masterClrMapping/>
-  </p:clrMapOvr>
-</p:sld>
-</file>
-
-<file path=ppt/slides/slide21.xml><?xml version="1.0" encoding="utf-8"?>
-<p:sld xmlns:a="http://schemas.openxmlformats.org/drawingml/2006/main" xmlns:r="http://schemas.openxmlformats.org/officeDocument/2006/relationships" xmlns:p="http://schemas.openxmlformats.org/presentationml/2006/main">
-  <p:cSld>
-    <p:spTree>
-      <p:nvGrpSpPr>
-        <p:cNvPr id="1" name=""/>
-        <p:cNvGrpSpPr/>
-        <p:nvPr/>
-      </p:nvGrpSpPr>
-      <p:grpSpPr>
-        <a:xfrm>
-          <a:off x="0" y="0"/>
-          <a:ext cx="0" cy="0"/>
-          <a:chOff x="0" y="0"/>
-          <a:chExt cx="0" cy="0"/>
-        </a:xfrm>
-      </p:grpSpPr>
-      <p:sp>
-        <p:nvSpPr>
-          <p:cNvPr id="2" name="Заголовок 1"/>
-          <p:cNvSpPr>
-            <a:spLocks noGrp="1"/>
-          </p:cNvSpPr>
-          <p:nvPr>
-            <p:ph type="title"/>
-          </p:nvPr>
-        </p:nvSpPr>
-        <p:spPr/>
-        <p:txBody>
-          <a:bodyPr/>
-          <a:lstStyle/>
-          <a:p>
-            <a:r>
-              <a:rPr lang="ru-RU" b="1" dirty="0"/>
               <a:t>Заключение:</a:t>
             </a:r>
             <a:endParaRPr lang="en-GB" dirty="0"/>
